--- a/09_meetings/UMI_Sales_Review_2026/ISZE_UMI_Sales_Review_FY2027.pptx
+++ b/09_meetings/UMI_Sales_Review_2026/ISZE_UMI_Sales_Review_FY2027.pptx
@@ -5686,6 +5686,34 @@
                 </a:solidFill>
                 <a:latin typeface="Calibri"/>
               </a:rPr>
+              <a:t>End-2026 mix: LCV / D-Max 17,161.</a:t>
+            </a:r>
+          </a:p>
+          <a:p>
+            <a:pPr>
+              <a:lnSpc>
+                <a:spcPct val="125000"/>
+              </a:lnSpc>
+              <a:spcAft>
+                <a:spcPts val="1000"/>
+              </a:spcAft>
+            </a:pPr>
+            <a:r>
+              <a:rPr sz="1250" b="1">
+                <a:solidFill>
+                  <a:srgbClr val="CC0E1E"/>
+                </a:solidFill>
+                <a:latin typeface="Calibri"/>
+              </a:rPr>
+              <a:t>—  </a:t>
+            </a:r>
+            <a:r>
+              <a:rPr sz="1250">
+                <a:solidFill>
+                  <a:srgbClr val="1A1A1A"/>
+                </a:solidFill>
+                <a:latin typeface="Calibri"/>
+              </a:rPr>
               <a:t>The FY2027 Sales-to-Dealer target starts from that fleet change, then applies a 5% price adjustment and 1.8% additional growth.</a:t>
             </a:r>
           </a:p>
@@ -11796,7 +11824,7 @@
                 </a:solidFill>
                 <a:latin typeface="Calibri"/>
               </a:rPr>
-              <a:t>GPS — calendar year and fiscal year on one chart (incl. warranty)</a:t>
+              <a:t>GPS — fiscal year (headline vs excl. warranty; max two lines)</a:t>
             </a:r>
           </a:p>
           <a:p>
@@ -11852,7 +11880,7 @@
                 </a:solidFill>
                 <a:latin typeface="Calibri"/>
               </a:rPr>
-              <a:t>Where the money went — outside the service-parts basket</a:t>
+              <a:t>Where the money went — outside the service-parts basket (FY)</a:t>
             </a:r>
           </a:p>
           <a:p>
@@ -11880,7 +11908,7 @@
                 </a:solidFill>
                 <a:latin typeface="Calibri"/>
               </a:rPr>
-              <a:t>Service parts: calendar-year capture vs network + fiscal-year billing</a:t>
+              <a:t>Service parts: CY capture vs network + FY billing (capture % is CY-only by design)</a:t>
             </a:r>
           </a:p>
           <a:p>
@@ -11908,7 +11936,7 @@
                 </a:solidFill>
                 <a:latin typeface="Calibri"/>
               </a:rPr>
-              <a:t>Brake pads — BVP share of total brake pad sales</a:t>
+              <a:t>Brake pads — BVP share of total brake pad sales (FY)</a:t>
             </a:r>
           </a:p>
           <a:p>
@@ -12155,7 +12183,7 @@
                 </a:solidFill>
                 <a:latin typeface="Calibri"/>
               </a:rPr>
-              <a:t>GPS: calendar year, fiscal year, and after warranty</a:t>
+              <a:t>GPS: fiscal year headline vs after warranty</a:t>
             </a:r>
           </a:p>
         </p:txBody>
@@ -12386,7 +12414,7 @@
                 </a:solidFill>
                 <a:latin typeface="Calibri"/>
               </a:rPr>
-              <a:t>Red = calendar-year GPS. Recent peak 80.7%; CY2025 = 71.6%.</a:t>
+              <a:t>Red = fiscal-year GPS (frozen CY2025 wallet). FY25 59.2% → FY26 54.2%.</a:t>
             </a:r>
           </a:p>
           <a:p>
@@ -12414,7 +12442,7 @@
                 </a:solidFill>
                 <a:latin typeface="Calibri"/>
               </a:rPr>
-              <a:t>Black = fiscal-year GPS (frozen CY2025 wallet). FY26 headline 54.2%.</a:t>
+              <a:t>Black = fiscal GPS after removing warranty parts (€). FY26 ≈ 18.9% (warranty EUR 1,633,086 ≈ 65% of FY26 billing).</a:t>
             </a:r>
           </a:p>
           <a:p>
@@ -12442,35 +12470,7 @@
                 </a:solidFill>
                 <a:latin typeface="Calibri"/>
               </a:rPr>
-              <a:t>Grey = fiscal GPS after removing warranty parts (€). FY26 ≈ 18.9% (warranty EUR 1,633,086 ≈ 65% of FY26 billing).</a:t>
-            </a:r>
-          </a:p>
-          <a:p>
-            <a:pPr>
-              <a:lnSpc>
-                <a:spcPct val="125000"/>
-              </a:lnSpc>
-              <a:spcAft>
-                <a:spcPts val="1000"/>
-              </a:spcAft>
-            </a:pPr>
-            <a:r>
-              <a:rPr sz="1250" b="1">
-                <a:solidFill>
-                  <a:srgbClr val="CC0E1E"/>
-                </a:solidFill>
-                <a:latin typeface="Calibri"/>
-              </a:rPr>
-              <a:t>—  </a:t>
-            </a:r>
-            <a:r>
-              <a:rPr sz="1250">
-                <a:solidFill>
-                  <a:srgbClr val="1A1A1A"/>
-                </a:solidFill>
-                <a:latin typeface="Calibri"/>
-              </a:rPr>
-              <a:t>Fleet 18,542 → 17,161 (working CY2026 estimate).</a:t>
+              <a:t>Fleet 18,542 → 17,161 (working year-end estimate under the FY2027 target).</a:t>
             </a:r>
           </a:p>
         </p:txBody>
@@ -13866,7 +13866,7 @@
                 </a:solidFill>
                 <a:latin typeface="Calibri"/>
               </a:rPr>
-              <a:t>Where the genuine drop sits (calendar 2024 → 2025)</a:t>
+              <a:t>Where the genuine drop sits (FY2025 → FY2026)</a:t>
             </a:r>
           </a:p>
         </p:txBody>
@@ -13995,7 +13995,7 @@
                 </a:solidFill>
                 <a:latin typeface="Calibri"/>
               </a:rPr>
-              <a:t>Genuine-only sales moved EUR 636,521 from CY2024 to CY2025.</a:t>
+              <a:t>Genuine-only sales moved EUR 194,105 from FY2025 to FY2026.</a:t>
             </a:r>
           </a:p>
           <a:p>
@@ -14023,7 +14023,35 @@
                 </a:solidFill>
                 <a:latin typeface="Calibri"/>
               </a:rPr>
-              <a:t>Of that, the routine service basket (filters, pads, rotors) moved EUR 193 on genuine-only; BVP in that basket moved EUR 53,053.</a:t>
+              <a:t>Of that, the routine service basket (filters, pads, rotors) moved EUR -3,606 on genuine-only; BVP in that basket moved EUR -31,193.</a:t>
+            </a:r>
+          </a:p>
+          <a:p>
+            <a:pPr>
+              <a:lnSpc>
+                <a:spcPct val="125000"/>
+              </a:lnSpc>
+              <a:spcAft>
+                <a:spcPts val="1000"/>
+              </a:spcAft>
+            </a:pPr>
+            <a:r>
+              <a:rPr sz="1500" b="1">
+                <a:solidFill>
+                  <a:srgbClr val="CC0E1E"/>
+                </a:solidFill>
+                <a:latin typeface="Calibri"/>
+              </a:rPr>
+              <a:t>—  </a:t>
+            </a:r>
+            <a:r>
+              <a:rPr sz="1500">
+                <a:solidFill>
+                  <a:srgbClr val="1A1A1A"/>
+                </a:solidFill>
+                <a:latin typeface="Calibri"/>
+              </a:rPr>
+              <a:t>Genuine-only did not fall on this FY cut — check category movers and H1 for pressure points.</a:t>
             </a:r>
           </a:p>
           <a:p>
@@ -16507,7 +16535,7 @@
                 </a:solidFill>
                 <a:latin typeface="Calibri"/>
               </a:rPr>
-              <a:t>Brake pads — BVP share of total brake pad sales</a:t>
+              <a:t>Brake pads — BVP share of total brake pad sales (FY)</a:t>
             </a:r>
           </a:p>
         </p:txBody>
@@ -16650,7 +16678,7 @@
                           </a:solidFill>
                           <a:latin typeface="Calibri"/>
                         </a:rPr>
-                        <a:t>2024</a:t>
+                        <a:t>FY2025</a:t>
                       </a:r>
                     </a:p>
                   </a:txBody>
@@ -16673,7 +16701,7 @@
                           </a:solidFill>
                           <a:latin typeface="Calibri"/>
                         </a:rPr>
-                        <a:t>2025</a:t>
+                        <a:t>FY2026</a:t>
                       </a:r>
                     </a:p>
                   </a:txBody>
